--- a/06-Ingest and load data.pptx
+++ b/06-Ingest and load data.pptx
@@ -5,10 +5,10 @@
     <p:sldMasterId id="2147483648" r:id="rId1"/>
   </p:sldMasterIdLst>
   <p:notesMasterIdLst>
-    <p:notesMasterId r:id="rId27"/>
+    <p:notesMasterId r:id="rId31"/>
   </p:notesMasterIdLst>
   <p:handoutMasterIdLst>
-    <p:handoutMasterId r:id="rId28"/>
+    <p:handoutMasterId r:id="rId32"/>
   </p:handoutMasterIdLst>
   <p:sldIdLst>
     <p:sldId id="256" r:id="rId2"/>
@@ -35,7 +35,11 @@
     <p:sldId id="2134805646" r:id="rId23"/>
     <p:sldId id="2134805644" r:id="rId24"/>
     <p:sldId id="2134805645" r:id="rId25"/>
-    <p:sldId id="424" r:id="rId26"/>
+    <p:sldId id="2134805647" r:id="rId26"/>
+    <p:sldId id="2563" r:id="rId27"/>
+    <p:sldId id="2567" r:id="rId28"/>
+    <p:sldId id="2572" r:id="rId29"/>
+    <p:sldId id="424" r:id="rId30"/>
   </p:sldIdLst>
   <p:sldSz cx="12192000" cy="6858000"/>
   <p:notesSz cx="6858000" cy="9144000"/>
@@ -250,7 +254,7 @@
           <a:p>
             <a:fld id="{2B56BDA5-FBCC-43E1-957B-02AF36889AD5}" type="datetimeFigureOut">
               <a:rPr lang="en-US" smtClean="0"/>
-              <a:t>9/5/2024</a:t>
+              <a:t>9/7/2024</a:t>
             </a:fld>
             <a:endParaRPr lang="en-US"/>
           </a:p>
@@ -427,7 +431,7 @@
           <a:p>
             <a:fld id="{8F44CDF0-0D54-4AFE-B409-D6358A9BB9A1}" type="datetimeFigureOut">
               <a:rPr lang="en-US" smtClean="0"/>
-              <a:t>9/5/2024</a:t>
+              <a:t>9/7/2024</a:t>
             </a:fld>
             <a:endParaRPr lang="en-US"/>
           </a:p>
@@ -3457,6 +3461,351 @@
           <a:bodyPr/>
           <a:lstStyle/>
           <a:p>
+            <a:endParaRPr lang="en-US" dirty="0"/>
+          </a:p>
+        </p:txBody>
+      </p:sp>
+      <p:sp>
+        <p:nvSpPr>
+          <p:cNvPr id="4" name="Slide Number Placeholder 3"/>
+          <p:cNvSpPr>
+            <a:spLocks noGrp="1"/>
+          </p:cNvSpPr>
+          <p:nvPr>
+            <p:ph type="sldNum" sz="quarter" idx="5"/>
+          </p:nvPr>
+        </p:nvSpPr>
+        <p:spPr/>
+        <p:txBody>
+          <a:bodyPr/>
+          <a:lstStyle/>
+          <a:p>
+            <a:fld id="{37E24C93-78CA-4AF0-9E77-825D60ABA46D}" type="slidenum">
+              <a:rPr lang="en-US" smtClean="0"/>
+              <a:t>25</a:t>
+            </a:fld>
+            <a:endParaRPr lang="en-US"/>
+          </a:p>
+        </p:txBody>
+      </p:sp>
+    </p:spTree>
+    <p:extLst>
+      <p:ext uri="{BB962C8B-B14F-4D97-AF65-F5344CB8AC3E}">
+        <p14:creationId xmlns:p14="http://schemas.microsoft.com/office/powerpoint/2010/main" val="992528250"/>
+      </p:ext>
+    </p:extLst>
+  </p:cSld>
+  <p:clrMapOvr>
+    <a:masterClrMapping/>
+  </p:clrMapOvr>
+</p:notes>
+</file>
+
+<file path=ppt/notesSlides/notesSlide25.xml><?xml version="1.0" encoding="utf-8"?>
+<p:notes xmlns:a="http://schemas.openxmlformats.org/drawingml/2006/main" xmlns:r="http://schemas.openxmlformats.org/officeDocument/2006/relationships" xmlns:p="http://schemas.openxmlformats.org/presentationml/2006/main">
+  <p:cSld>
+    <p:spTree>
+      <p:nvGrpSpPr>
+        <p:cNvPr id="1" name=""/>
+        <p:cNvGrpSpPr/>
+        <p:nvPr/>
+      </p:nvGrpSpPr>
+      <p:grpSpPr>
+        <a:xfrm>
+          <a:off x="0" y="0"/>
+          <a:ext cx="0" cy="0"/>
+          <a:chOff x="0" y="0"/>
+          <a:chExt cx="0" cy="0"/>
+        </a:xfrm>
+      </p:grpSpPr>
+      <p:sp>
+        <p:nvSpPr>
+          <p:cNvPr id="2" name="Slide Image Placeholder 1"/>
+          <p:cNvSpPr>
+            <a:spLocks noGrp="1" noRot="1" noChangeAspect="1"/>
+          </p:cNvSpPr>
+          <p:nvPr>
+            <p:ph type="sldImg"/>
+          </p:nvPr>
+        </p:nvSpPr>
+        <p:spPr/>
+      </p:sp>
+      <p:sp>
+        <p:nvSpPr>
+          <p:cNvPr id="3" name="Notes Placeholder 2"/>
+          <p:cNvSpPr>
+            <a:spLocks noGrp="1"/>
+          </p:cNvSpPr>
+          <p:nvPr>
+            <p:ph type="body" idx="1"/>
+          </p:nvPr>
+        </p:nvSpPr>
+        <p:spPr/>
+        <p:txBody>
+          <a:bodyPr/>
+          <a:lstStyle/>
+          <a:p>
+            <a:r>
+              <a:rPr lang="en-US"/>
+              <a:t>Machine Learning is a branch of artificial intelligence that enables systems to learn and improve from experience without being explicitly programmed. We will explore the different types of Machine Learning, including Supervised, Unsupervised, and Reinforcement Learning, and how they are used in real-world applications.</a:t>
+            </a:r>
+          </a:p>
+        </p:txBody>
+      </p:sp>
+      <p:sp>
+        <p:nvSpPr>
+          <p:cNvPr id="4" name="Slide Number Placeholder 3"/>
+          <p:cNvSpPr>
+            <a:spLocks noGrp="1"/>
+          </p:cNvSpPr>
+          <p:nvPr>
+            <p:ph type="sldNum" sz="quarter" idx="5"/>
+          </p:nvPr>
+        </p:nvSpPr>
+        <p:spPr/>
+        <p:txBody>
+          <a:bodyPr/>
+          <a:lstStyle/>
+          <a:p>
+            <a:fld id="{37E24C93-78CA-4AF0-9E77-825D60ABA46D}" type="slidenum">
+              <a:rPr lang="en-US" smtClean="0"/>
+              <a:t>26</a:t>
+            </a:fld>
+            <a:endParaRPr lang="en-US"/>
+          </a:p>
+        </p:txBody>
+      </p:sp>
+    </p:spTree>
+    <p:extLst>
+      <p:ext uri="{BB962C8B-B14F-4D97-AF65-F5344CB8AC3E}">
+        <p14:creationId xmlns:p14="http://schemas.microsoft.com/office/powerpoint/2010/main" val="2002370133"/>
+      </p:ext>
+    </p:extLst>
+  </p:cSld>
+  <p:clrMapOvr>
+    <a:masterClrMapping/>
+  </p:clrMapOvr>
+</p:notes>
+</file>
+
+<file path=ppt/notesSlides/notesSlide26.xml><?xml version="1.0" encoding="utf-8"?>
+<p:notes xmlns:a="http://schemas.openxmlformats.org/drawingml/2006/main" xmlns:r="http://schemas.openxmlformats.org/officeDocument/2006/relationships" xmlns:p="http://schemas.openxmlformats.org/presentationml/2006/main">
+  <p:cSld>
+    <p:spTree>
+      <p:nvGrpSpPr>
+        <p:cNvPr id="1" name=""/>
+        <p:cNvGrpSpPr/>
+        <p:nvPr/>
+      </p:nvGrpSpPr>
+      <p:grpSpPr>
+        <a:xfrm>
+          <a:off x="0" y="0"/>
+          <a:ext cx="0" cy="0"/>
+          <a:chOff x="0" y="0"/>
+          <a:chExt cx="0" cy="0"/>
+        </a:xfrm>
+      </p:grpSpPr>
+      <p:sp>
+        <p:nvSpPr>
+          <p:cNvPr id="2" name="Slide Image Placeholder 1"/>
+          <p:cNvSpPr>
+            <a:spLocks noGrp="1" noRot="1" noChangeAspect="1"/>
+          </p:cNvSpPr>
+          <p:nvPr>
+            <p:ph type="sldImg"/>
+          </p:nvPr>
+        </p:nvSpPr>
+        <p:spPr/>
+      </p:sp>
+      <p:sp>
+        <p:nvSpPr>
+          <p:cNvPr id="3" name="Notes Placeholder 2"/>
+          <p:cNvSpPr>
+            <a:spLocks noGrp="1"/>
+          </p:cNvSpPr>
+          <p:nvPr>
+            <p:ph type="body" idx="1"/>
+          </p:nvPr>
+        </p:nvSpPr>
+        <p:spPr/>
+        <p:txBody>
+          <a:bodyPr/>
+          <a:lstStyle/>
+          <a:p>
+            <a:r>
+              <a:rPr lang="en-US"/>
+              <a:t>Data Preparation is a crucial step in the Machine Learning process. It involves cleaning the data, handling missing values, and transforming the data into a format suitable for training a model. We will explore the different techniques used in Data Preparation.</a:t>
+            </a:r>
+          </a:p>
+        </p:txBody>
+      </p:sp>
+      <p:sp>
+        <p:nvSpPr>
+          <p:cNvPr id="4" name="Slide Number Placeholder 3"/>
+          <p:cNvSpPr>
+            <a:spLocks noGrp="1"/>
+          </p:cNvSpPr>
+          <p:nvPr>
+            <p:ph type="sldNum" sz="quarter" idx="5"/>
+          </p:nvPr>
+        </p:nvSpPr>
+        <p:spPr/>
+        <p:txBody>
+          <a:bodyPr/>
+          <a:lstStyle/>
+          <a:p>
+            <a:fld id="{37E24C93-78CA-4AF0-9E77-825D60ABA46D}" type="slidenum">
+              <a:rPr lang="en-US" smtClean="0"/>
+              <a:t>27</a:t>
+            </a:fld>
+            <a:endParaRPr lang="en-US"/>
+          </a:p>
+        </p:txBody>
+      </p:sp>
+    </p:spTree>
+    <p:extLst>
+      <p:ext uri="{BB962C8B-B14F-4D97-AF65-F5344CB8AC3E}">
+        <p14:creationId xmlns:p14="http://schemas.microsoft.com/office/powerpoint/2010/main" val="3495359663"/>
+      </p:ext>
+    </p:extLst>
+  </p:cSld>
+  <p:clrMapOvr>
+    <a:masterClrMapping/>
+  </p:clrMapOvr>
+</p:notes>
+</file>
+
+<file path=ppt/notesSlides/notesSlide27.xml><?xml version="1.0" encoding="utf-8"?>
+<p:notes xmlns:a="http://schemas.openxmlformats.org/drawingml/2006/main" xmlns:r="http://schemas.openxmlformats.org/officeDocument/2006/relationships" xmlns:p="http://schemas.openxmlformats.org/presentationml/2006/main">
+  <p:cSld>
+    <p:spTree>
+      <p:nvGrpSpPr>
+        <p:cNvPr id="1" name=""/>
+        <p:cNvGrpSpPr/>
+        <p:nvPr/>
+      </p:nvGrpSpPr>
+      <p:grpSpPr>
+        <a:xfrm>
+          <a:off x="0" y="0"/>
+          <a:ext cx="0" cy="0"/>
+          <a:chOff x="0" y="0"/>
+          <a:chExt cx="0" cy="0"/>
+        </a:xfrm>
+      </p:grpSpPr>
+      <p:sp>
+        <p:nvSpPr>
+          <p:cNvPr id="2" name="Slide Image Placeholder 1"/>
+          <p:cNvSpPr>
+            <a:spLocks noGrp="1" noRot="1" noChangeAspect="1"/>
+          </p:cNvSpPr>
+          <p:nvPr>
+            <p:ph type="sldImg"/>
+          </p:nvPr>
+        </p:nvSpPr>
+        <p:spPr/>
+      </p:sp>
+      <p:sp>
+        <p:nvSpPr>
+          <p:cNvPr id="3" name="Notes Placeholder 2"/>
+          <p:cNvSpPr>
+            <a:spLocks noGrp="1"/>
+          </p:cNvSpPr>
+          <p:nvPr>
+            <p:ph type="body" idx="1"/>
+          </p:nvPr>
+        </p:nvSpPr>
+        <p:spPr/>
+        <p:txBody>
+          <a:bodyPr/>
+          <a:lstStyle/>
+          <a:p>
+            <a:r>
+              <a:rPr lang="en-US"/>
+              <a:t>Logistic Regression is a popular classification algorithm used in Machine Learning. We will provide an overview of how Logistic Regression works and how it can be used to solve classification problems.</a:t>
+            </a:r>
+          </a:p>
+        </p:txBody>
+      </p:sp>
+      <p:sp>
+        <p:nvSpPr>
+          <p:cNvPr id="4" name="Slide Number Placeholder 3"/>
+          <p:cNvSpPr>
+            <a:spLocks noGrp="1"/>
+          </p:cNvSpPr>
+          <p:nvPr>
+            <p:ph type="sldNum" sz="quarter" idx="5"/>
+          </p:nvPr>
+        </p:nvSpPr>
+        <p:spPr/>
+        <p:txBody>
+          <a:bodyPr/>
+          <a:lstStyle/>
+          <a:p>
+            <a:fld id="{37E24C93-78CA-4AF0-9E77-825D60ABA46D}" type="slidenum">
+              <a:rPr lang="en-US" smtClean="0"/>
+              <a:t>28</a:t>
+            </a:fld>
+            <a:endParaRPr lang="en-US"/>
+          </a:p>
+        </p:txBody>
+      </p:sp>
+    </p:spTree>
+    <p:extLst>
+      <p:ext uri="{BB962C8B-B14F-4D97-AF65-F5344CB8AC3E}">
+        <p14:creationId xmlns:p14="http://schemas.microsoft.com/office/powerpoint/2010/main" val="1990483217"/>
+      </p:ext>
+    </p:extLst>
+  </p:cSld>
+  <p:clrMapOvr>
+    <a:masterClrMapping/>
+  </p:clrMapOvr>
+</p:notes>
+</file>
+
+<file path=ppt/notesSlides/notesSlide28.xml><?xml version="1.0" encoding="utf-8"?>
+<p:notes xmlns:a="http://schemas.openxmlformats.org/drawingml/2006/main" xmlns:r="http://schemas.openxmlformats.org/officeDocument/2006/relationships" xmlns:p="http://schemas.openxmlformats.org/presentationml/2006/main">
+  <p:cSld>
+    <p:spTree>
+      <p:nvGrpSpPr>
+        <p:cNvPr id="1" name=""/>
+        <p:cNvGrpSpPr/>
+        <p:nvPr/>
+      </p:nvGrpSpPr>
+      <p:grpSpPr>
+        <a:xfrm>
+          <a:off x="0" y="0"/>
+          <a:ext cx="0" cy="0"/>
+          <a:chOff x="0" y="0"/>
+          <a:chExt cx="0" cy="0"/>
+        </a:xfrm>
+      </p:grpSpPr>
+      <p:sp>
+        <p:nvSpPr>
+          <p:cNvPr id="2" name="Slide Image Placeholder 1"/>
+          <p:cNvSpPr>
+            <a:spLocks noGrp="1" noRot="1" noChangeAspect="1"/>
+          </p:cNvSpPr>
+          <p:nvPr>
+            <p:ph type="sldImg"/>
+          </p:nvPr>
+        </p:nvSpPr>
+        <p:spPr/>
+      </p:sp>
+      <p:sp>
+        <p:nvSpPr>
+          <p:cNvPr id="3" name="Notes Placeholder 2"/>
+          <p:cNvSpPr>
+            <a:spLocks noGrp="1"/>
+          </p:cNvSpPr>
+          <p:nvPr>
+            <p:ph type="body" idx="1"/>
+          </p:nvPr>
+        </p:nvSpPr>
+        <p:spPr/>
+        <p:txBody>
+          <a:bodyPr/>
+          <a:lstStyle/>
+          <a:p>
             <a:pPr algn="l" rtl="0" fontAlgn="base"/>
             <a:r>
               <a:rPr lang="en-US" sz="1200" b="1" i="0" u="none" strike="noStrike" dirty="0">
@@ -3610,7 +3959,7 @@
           <a:p>
             <a:fld id="{37E24C93-78CA-4AF0-9E77-825D60ABA46D}" type="slidenum">
               <a:rPr lang="en-US" smtClean="0"/>
-              <a:t>25</a:t>
+              <a:t>29</a:t>
             </a:fld>
             <a:endParaRPr lang="en-US"/>
           </a:p>
@@ -27351,10 +27700,10 @@
               <p:nvPr/>
             </p:nvPicPr>
             <p:blipFill>
-              <a:blip r:embed="rId11">
+              <a:blip r:embed="rId7">
                 <a:extLst>
                   <a:ext uri="{96DAC541-7B7A-43D3-8B79-37D633B846F1}">
-                    <asvg:svgBlip xmlns:asvg="http://schemas.microsoft.com/office/drawing/2016/SVG/main" r:embed="rId12"/>
+                    <asvg:svgBlip xmlns:asvg="http://schemas.microsoft.com/office/drawing/2016/SVG/main" r:embed="rId11"/>
                   </a:ext>
                 </a:extLst>
               </a:blip>
@@ -27489,10 +27838,10 @@
                 <p:nvPr/>
               </p:nvPicPr>
               <p:blipFill>
-                <a:blip r:embed="rId13">
+                <a:blip r:embed="rId12">
                   <a:extLst>
                     <a:ext uri="{96DAC541-7B7A-43D3-8B79-37D633B846F1}">
-                      <asvg:svgBlip xmlns:asvg="http://schemas.microsoft.com/office/drawing/2016/SVG/main" r:embed="rId14"/>
+                      <asvg:svgBlip xmlns:asvg="http://schemas.microsoft.com/office/drawing/2016/SVG/main" r:embed="rId13"/>
                     </a:ext>
                   </a:extLst>
                 </a:blip>
@@ -30825,6 +31174,27 @@
               <a:rPr lang="en-GB" sz="1800" dirty="0"/>
               <a:t>Load data into a relational data warehouse</a:t>
             </a:r>
+          </a:p>
+          <a:p>
+            <a:endParaRPr lang="en-GB" sz="1800" dirty="0"/>
+          </a:p>
+          <a:p>
+            <a:r>
+              <a:rPr lang="en-US" sz="1800" b="0" i="0" dirty="0">
+                <a:solidFill>
+                  <a:srgbClr val="3B3A39"/>
+                </a:solidFill>
+                <a:effectLst/>
+                <a:latin typeface="Segoe UI" panose="020B0502040204020203" pitchFamily="34" charset="0"/>
+              </a:rPr>
+              <a:t>Data preparation and Machine Learning</a:t>
+            </a:r>
+          </a:p>
+          <a:p>
+            <a:pPr marL="0" indent="0">
+              <a:buNone/>
+            </a:pPr>
+            <a:endParaRPr lang="en-GB" sz="1800" dirty="0"/>
           </a:p>
         </p:txBody>
       </p:sp>
@@ -41156,6 +41526,1427 @@
 </file>
 
 <file path=ppt/slides/slide25.xml><?xml version="1.0" encoding="utf-8"?>
+<p:sld xmlns:a="http://schemas.openxmlformats.org/drawingml/2006/main" xmlns:r="http://schemas.openxmlformats.org/officeDocument/2006/relationships" xmlns:p="http://schemas.openxmlformats.org/presentationml/2006/main">
+  <p:cSld>
+    <p:spTree>
+      <p:nvGrpSpPr>
+        <p:cNvPr id="1" name=""/>
+        <p:cNvGrpSpPr/>
+        <p:nvPr/>
+      </p:nvGrpSpPr>
+      <p:grpSpPr>
+        <a:xfrm>
+          <a:off x="0" y="0"/>
+          <a:ext cx="0" cy="0"/>
+          <a:chOff x="0" y="0"/>
+          <a:chExt cx="0" cy="0"/>
+        </a:xfrm>
+      </p:grpSpPr>
+      <p:sp>
+        <p:nvSpPr>
+          <p:cNvPr id="3" name="Subtitle 2">
+            <a:extLst>
+              <a:ext uri="{FF2B5EF4-FFF2-40B4-BE49-F238E27FC236}">
+                <a16:creationId xmlns:a16="http://schemas.microsoft.com/office/drawing/2014/main" id="{9BB5340F-D937-4A25-A55F-E96196F1556E}"/>
+              </a:ext>
+            </a:extLst>
+          </p:cNvPr>
+          <p:cNvSpPr>
+            <a:spLocks noGrp="1"/>
+          </p:cNvSpPr>
+          <p:nvPr>
+            <p:ph type="subTitle" idx="1"/>
+          </p:nvPr>
+        </p:nvSpPr>
+        <p:spPr/>
+        <p:txBody>
+          <a:bodyPr/>
+          <a:lstStyle/>
+          <a:p>
+            <a:endParaRPr lang="en-US" dirty="0"/>
+          </a:p>
+        </p:txBody>
+      </p:sp>
+      <p:sp>
+        <p:nvSpPr>
+          <p:cNvPr id="4" name="Text Placeholder 3">
+            <a:extLst>
+              <a:ext uri="{FF2B5EF4-FFF2-40B4-BE49-F238E27FC236}">
+                <a16:creationId xmlns:a16="http://schemas.microsoft.com/office/drawing/2014/main" id="{B101C998-4CDB-4043-AA72-17249D9DB4C5}"/>
+              </a:ext>
+            </a:extLst>
+          </p:cNvPr>
+          <p:cNvSpPr>
+            <a:spLocks noGrp="1"/>
+          </p:cNvSpPr>
+          <p:nvPr>
+            <p:ph type="body" sz="quarter" idx="10"/>
+          </p:nvPr>
+        </p:nvSpPr>
+        <p:spPr/>
+        <p:txBody>
+          <a:bodyPr/>
+          <a:lstStyle/>
+          <a:p>
+            <a:r>
+              <a:rPr lang="en-US" dirty="0"/>
+              <a:t>4</a:t>
+            </a:r>
+          </a:p>
+        </p:txBody>
+      </p:sp>
+      <p:sp>
+        <p:nvSpPr>
+          <p:cNvPr id="2" name="Title 1">
+            <a:extLst>
+              <a:ext uri="{FF2B5EF4-FFF2-40B4-BE49-F238E27FC236}">
+                <a16:creationId xmlns:a16="http://schemas.microsoft.com/office/drawing/2014/main" id="{3B087B49-54C8-4526-A837-B7B5E559014F}"/>
+              </a:ext>
+            </a:extLst>
+          </p:cNvPr>
+          <p:cNvSpPr>
+            <a:spLocks noGrp="1"/>
+          </p:cNvSpPr>
+          <p:nvPr>
+            <p:ph type="ctrTitle"/>
+          </p:nvPr>
+        </p:nvSpPr>
+        <p:spPr/>
+        <p:txBody>
+          <a:bodyPr/>
+          <a:lstStyle/>
+          <a:p>
+            <a:r>
+              <a:rPr lang="en-US" dirty="0"/>
+              <a:t>Data preparation and Machine Learning</a:t>
+            </a:r>
+          </a:p>
+        </p:txBody>
+      </p:sp>
+    </p:spTree>
+    <p:extLst>
+      <p:ext uri="{BB962C8B-B14F-4D97-AF65-F5344CB8AC3E}">
+        <p14:creationId xmlns:p14="http://schemas.microsoft.com/office/powerpoint/2010/main" val="789553895"/>
+      </p:ext>
+    </p:extLst>
+  </p:cSld>
+  <p:clrMapOvr>
+    <a:masterClrMapping/>
+  </p:clrMapOvr>
+</p:sld>
+</file>
+
+<file path=ppt/slides/slide26.xml><?xml version="1.0" encoding="utf-8"?>
+<p:sld xmlns:a="http://schemas.openxmlformats.org/drawingml/2006/main" xmlns:r="http://schemas.openxmlformats.org/officeDocument/2006/relationships" xmlns:p="http://schemas.openxmlformats.org/presentationml/2006/main">
+  <p:cSld>
+    <p:spTree>
+      <p:nvGrpSpPr>
+        <p:cNvPr id="1" name=""/>
+        <p:cNvGrpSpPr/>
+        <p:nvPr/>
+      </p:nvGrpSpPr>
+      <p:grpSpPr>
+        <a:xfrm>
+          <a:off x="0" y="0"/>
+          <a:ext cx="0" cy="0"/>
+          <a:chOff x="0" y="0"/>
+          <a:chExt cx="0" cy="0"/>
+        </a:xfrm>
+      </p:grpSpPr>
+      <p:sp>
+        <p:nvSpPr>
+          <p:cNvPr id="8" name="Title 7">
+            <a:extLst>
+              <a:ext uri="{FF2B5EF4-FFF2-40B4-BE49-F238E27FC236}">
+                <a16:creationId xmlns:a16="http://schemas.microsoft.com/office/drawing/2014/main" id="{4C6747F9-0EEE-0C90-8314-34BDEBBD8089}"/>
+              </a:ext>
+            </a:extLst>
+          </p:cNvPr>
+          <p:cNvSpPr>
+            <a:spLocks noGrp="1"/>
+          </p:cNvSpPr>
+          <p:nvPr>
+            <p:ph type="title"/>
+          </p:nvPr>
+        </p:nvSpPr>
+        <p:spPr>
+          <a:xfrm>
+            <a:off x="640442" y="1240972"/>
+            <a:ext cx="4882243" cy="1416958"/>
+          </a:xfrm>
+        </p:spPr>
+        <p:txBody>
+          <a:bodyPr anchor="ctr">
+            <a:normAutofit/>
+          </a:bodyPr>
+          <a:lstStyle/>
+          <a:p>
+            <a:r>
+              <a:rPr lang="en-US"/>
+              <a:t>Machine Learning Overview</a:t>
+            </a:r>
+          </a:p>
+        </p:txBody>
+      </p:sp>
+      <p:sp>
+        <p:nvSpPr>
+          <p:cNvPr id="2" name="Footer Placeholder 1">
+            <a:extLst>
+              <a:ext uri="{FF2B5EF4-FFF2-40B4-BE49-F238E27FC236}">
+                <a16:creationId xmlns:a16="http://schemas.microsoft.com/office/drawing/2014/main" id="{9AE7975C-A402-89D2-F30E-CDFB1F21DCFB}"/>
+              </a:ext>
+            </a:extLst>
+          </p:cNvPr>
+          <p:cNvSpPr>
+            <a:spLocks noGrp="1"/>
+          </p:cNvSpPr>
+          <p:nvPr>
+            <p:ph type="ftr" sz="quarter" idx="3"/>
+          </p:nvPr>
+        </p:nvSpPr>
+        <p:spPr>
+          <a:xfrm>
+            <a:off x="7234764" y="6466371"/>
+            <a:ext cx="4114800" cy="331932"/>
+          </a:xfrm>
+        </p:spPr>
+        <p:txBody>
+          <a:bodyPr anchor="ctr">
+            <a:normAutofit/>
+          </a:bodyPr>
+          <a:lstStyle/>
+          <a:p>
+            <a:pPr>
+              <a:spcAft>
+                <a:spcPts val="600"/>
+              </a:spcAft>
+            </a:pPr>
+            <a:r>
+              <a:rPr lang="en-US"/>
+              <a:t>WWW.SOLLIANCE.NET</a:t>
+            </a:r>
+          </a:p>
+        </p:txBody>
+      </p:sp>
+      <p:sp>
+        <p:nvSpPr>
+          <p:cNvPr id="3" name="Slide Number Placeholder 2">
+            <a:extLst>
+              <a:ext uri="{FF2B5EF4-FFF2-40B4-BE49-F238E27FC236}">
+                <a16:creationId xmlns:a16="http://schemas.microsoft.com/office/drawing/2014/main" id="{76C96CEB-F4CC-00F8-49CF-3586F2B6C7F8}"/>
+              </a:ext>
+            </a:extLst>
+          </p:cNvPr>
+          <p:cNvSpPr>
+            <a:spLocks noGrp="1"/>
+          </p:cNvSpPr>
+          <p:nvPr>
+            <p:ph type="sldNum" sz="quarter" idx="4"/>
+          </p:nvPr>
+        </p:nvSpPr>
+        <p:spPr>
+          <a:xfrm>
+            <a:off x="11636830" y="6466371"/>
+            <a:ext cx="436355" cy="331932"/>
+          </a:xfrm>
+        </p:spPr>
+        <p:txBody>
+          <a:bodyPr anchor="ctr">
+            <a:normAutofit/>
+          </a:bodyPr>
+          <a:lstStyle/>
+          <a:p>
+            <a:pPr>
+              <a:spcAft>
+                <a:spcPts val="600"/>
+              </a:spcAft>
+            </a:pPr>
+            <a:fld id="{00F9DAA1-1DF7-43E0-8E29-0CE1148553C7}" type="slidenum">
+              <a:rPr lang="en-US" smtClean="0"/>
+              <a:pPr>
+                <a:spcAft>
+                  <a:spcPts val="600"/>
+                </a:spcAft>
+              </a:pPr>
+              <a:t>26</a:t>
+            </a:fld>
+            <a:endParaRPr lang="en-US"/>
+          </a:p>
+        </p:txBody>
+      </p:sp>
+      <p:sp>
+        <p:nvSpPr>
+          <p:cNvPr id="6" name="Content Placeholder 5">
+            <a:extLst>
+              <a:ext uri="{FF2B5EF4-FFF2-40B4-BE49-F238E27FC236}">
+                <a16:creationId xmlns:a16="http://schemas.microsoft.com/office/drawing/2014/main" id="{CB842FFD-99DE-AD63-599F-D7BD5E3F0073}"/>
+              </a:ext>
+            </a:extLst>
+          </p:cNvPr>
+          <p:cNvSpPr>
+            <a:spLocks noGrp="1"/>
+          </p:cNvSpPr>
+          <p:nvPr>
+            <p:ph type="body" sz="quarter" idx="10"/>
+            <p:extLst>
+              <p:ext uri="{E7BDC344-281C-4309-B0C6-D0EE65EED2A8}">
+                <p202:designPr xmlns:p202="http://schemas.microsoft.com/office/powerpoint/2020/02/main">
+                  <p202:designTagLst>
+                    <p202:designTag name="ARCH:1:CLS" val="InformationBlock"/>
+                    <p202:designTag name="ARCH:1:VSVAR" val="TitledTextBox"/>
+                  </p202:designTagLst>
+                </p202:designPr>
+              </p:ext>
+            </p:extLst>
+          </p:nvPr>
+        </p:nvSpPr>
+        <p:spPr>
+          <a:xfrm>
+            <a:off x="524607" y="2559150"/>
+            <a:ext cx="5043855" cy="3319973"/>
+          </a:xfrm>
+          <a:solidFill>
+            <a:srgbClr val="1A1F20">
+              <a:alpha val="60000"/>
+            </a:srgbClr>
+          </a:solidFill>
+        </p:spPr>
+        <p:txBody>
+          <a:bodyPr>
+            <a:noAutofit/>
+          </a:bodyPr>
+          <a:lstStyle/>
+          <a:p>
+            <a:pPr marL="0" indent="0">
+              <a:lnSpc>
+                <a:spcPct val="110000"/>
+              </a:lnSpc>
+              <a:spcBef>
+                <a:spcPts val="2500"/>
+              </a:spcBef>
+              <a:buNone/>
+            </a:pPr>
+            <a:r>
+              <a:rPr lang="en-US" sz="1200" b="1" dirty="0"/>
+              <a:t>What is Machine Learning?</a:t>
+            </a:r>
+          </a:p>
+          <a:p>
+            <a:pPr marL="0" lvl="1" indent="0">
+              <a:lnSpc>
+                <a:spcPct val="110000"/>
+              </a:lnSpc>
+              <a:buNone/>
+            </a:pPr>
+            <a:r>
+              <a:rPr lang="en-US" dirty="0"/>
+              <a:t>Machine Learning is a branch of artificial intelligence that enables systems to learn and improve from experience without being explicitly programmed. It is used to analyze and find patterns in complex data sets, and is used in a variety of industries including healthcare, finance, and transportation.</a:t>
+            </a:r>
+          </a:p>
+          <a:p>
+            <a:pPr marL="0" indent="0">
+              <a:lnSpc>
+                <a:spcPct val="110000"/>
+              </a:lnSpc>
+              <a:spcBef>
+                <a:spcPts val="2500"/>
+              </a:spcBef>
+              <a:buNone/>
+            </a:pPr>
+            <a:r>
+              <a:rPr lang="en-US" sz="1200" b="1" dirty="0"/>
+              <a:t>Types of Machine Learning</a:t>
+            </a:r>
+          </a:p>
+          <a:p>
+            <a:pPr marL="0" lvl="1" indent="0">
+              <a:lnSpc>
+                <a:spcPct val="110000"/>
+              </a:lnSpc>
+              <a:buNone/>
+            </a:pPr>
+            <a:r>
+              <a:rPr lang="en-US" dirty="0"/>
+              <a:t>There are three main types of Machine Learning: Supervised, Unsupervised, and Reinforcement Learning. Supervised learning uses labeled data to predict and classify new data, Unsupervised learning finds patterns and relationships in unlabeled data, and Reinforcement learning trains models to make decisions based on rewards and punishments.</a:t>
+            </a:r>
+          </a:p>
+        </p:txBody>
+      </p:sp>
+      <p:pic>
+        <p:nvPicPr>
+          <p:cNvPr id="10" name="Content Placeholder 9" descr="Brain model with neuron, synapse, receptor and verbs. on dark backgrounds.">
+            <a:extLst>
+              <a:ext uri="{FF2B5EF4-FFF2-40B4-BE49-F238E27FC236}">
+                <a16:creationId xmlns:a16="http://schemas.microsoft.com/office/drawing/2014/main" id="{E8CC908A-3E2C-499D-A087-B97C5BA8B782}"/>
+              </a:ext>
+            </a:extLst>
+          </p:cNvPr>
+          <p:cNvPicPr>
+            <a:picLocks noGrp="1" noChangeAspect="1"/>
+          </p:cNvPicPr>
+          <p:nvPr>
+            <p:ph sz="quarter" idx="11"/>
+          </p:nvPr>
+        </p:nvPicPr>
+        <p:blipFill>
+          <a:blip r:embed="rId3"/>
+          <a:srcRect l="29260" r="19987" b="1"/>
+          <a:stretch/>
+        </p:blipFill>
+        <p:spPr>
+          <a:xfrm>
+            <a:off x="6679096" y="551543"/>
+            <a:ext cx="4865204" cy="5392057"/>
+          </a:xfrm>
+          <a:noFill/>
+        </p:spPr>
+      </p:pic>
+    </p:spTree>
+    <p:extLst>
+      <p:ext uri="{BB962C8B-B14F-4D97-AF65-F5344CB8AC3E}">
+        <p14:creationId xmlns:p14="http://schemas.microsoft.com/office/powerpoint/2010/main" val="2714040137"/>
+      </p:ext>
+    </p:extLst>
+  </p:cSld>
+  <p:clrMapOvr>
+    <a:masterClrMapping/>
+  </p:clrMapOvr>
+  <p:transition>
+    <p:fade/>
+  </p:transition>
+  <p:timing>
+    <p:tnLst>
+      <p:par>
+        <p:cTn id="1" dur="indefinite" restart="never" nodeType="tmRoot">
+          <p:childTnLst>
+            <p:seq concurrent="1" nextAc="seek">
+              <p:cTn id="2" dur="indefinite" nodeType="mainSeq">
+                <p:childTnLst>
+                  <p:par>
+                    <p:cTn id="3" fill="hold">
+                      <p:stCondLst>
+                        <p:cond delay="indefinite"/>
+                        <p:cond evt="onBegin" delay="0">
+                          <p:tn val="2"/>
+                        </p:cond>
+                      </p:stCondLst>
+                      <p:childTnLst>
+                        <p:par>
+                          <p:cTn id="4" fill="hold">
+                            <p:stCondLst>
+                              <p:cond delay="0"/>
+                            </p:stCondLst>
+                            <p:childTnLst>
+                              <p:par>
+                                <p:cTn id="5" presetID="42" presetClass="entr" presetSubtype="0" fill="hold" grpId="0" nodeType="withEffect">
+                                  <p:stCondLst>
+                                    <p:cond delay="250"/>
+                                  </p:stCondLst>
+                                  <p:iterate>
+                                    <p:tmPct val="10000"/>
+                                  </p:iterate>
+                                  <p:childTnLst>
+                                    <p:set>
+                                      <p:cBhvr>
+                                        <p:cTn id="6" dur="1" fill="hold">
+                                          <p:stCondLst>
+                                            <p:cond delay="0"/>
+                                          </p:stCondLst>
+                                        </p:cTn>
+                                        <p:tgtEl>
+                                          <p:spTgt spid="6"/>
+                                        </p:tgtEl>
+                                        <p:attrNameLst>
+                                          <p:attrName>style.visibility</p:attrName>
+                                        </p:attrNameLst>
+                                      </p:cBhvr>
+                                      <p:to>
+                                        <p:strVal val="visible"/>
+                                      </p:to>
+                                    </p:set>
+                                    <p:animEffect transition="in" filter="fade">
+                                      <p:cBhvr>
+                                        <p:cTn id="7" dur="250"/>
+                                        <p:tgtEl>
+                                          <p:spTgt spid="6"/>
+                                        </p:tgtEl>
+                                      </p:cBhvr>
+                                    </p:animEffect>
+                                    <p:anim calcmode="lin" valueType="num">
+                                      <p:cBhvr>
+                                        <p:cTn id="8" dur="250" fill="hold"/>
+                                        <p:tgtEl>
+                                          <p:spTgt spid="6"/>
+                                        </p:tgtEl>
+                                        <p:attrNameLst>
+                                          <p:attrName>ppt_x</p:attrName>
+                                        </p:attrNameLst>
+                                      </p:cBhvr>
+                                      <p:tavLst>
+                                        <p:tav tm="0">
+                                          <p:val>
+                                            <p:strVal val="#ppt_x"/>
+                                          </p:val>
+                                        </p:tav>
+                                        <p:tav tm="100000">
+                                          <p:val>
+                                            <p:strVal val="#ppt_x"/>
+                                          </p:val>
+                                        </p:tav>
+                                      </p:tavLst>
+                                    </p:anim>
+                                    <p:anim calcmode="lin" valueType="num">
+                                      <p:cBhvr>
+                                        <p:cTn id="9" dur="250" fill="hold"/>
+                                        <p:tgtEl>
+                                          <p:spTgt spid="6"/>
+                                        </p:tgtEl>
+                                        <p:attrNameLst>
+                                          <p:attrName>ppt_y</p:attrName>
+                                        </p:attrNameLst>
+                                      </p:cBhvr>
+                                      <p:tavLst>
+                                        <p:tav tm="0">
+                                          <p:val>
+                                            <p:strVal val="#ppt_y+.1"/>
+                                          </p:val>
+                                        </p:tav>
+                                        <p:tav tm="100000">
+                                          <p:val>
+                                            <p:strVal val="#ppt_y"/>
+                                          </p:val>
+                                        </p:tav>
+                                      </p:tavLst>
+                                    </p:anim>
+                                  </p:childTnLst>
+                                </p:cTn>
+                              </p:par>
+                            </p:childTnLst>
+                          </p:cTn>
+                        </p:par>
+                      </p:childTnLst>
+                    </p:cTn>
+                  </p:par>
+                </p:childTnLst>
+              </p:cTn>
+              <p:prevCondLst>
+                <p:cond evt="onPrev" delay="0">
+                  <p:tgtEl>
+                    <p:sldTgt/>
+                  </p:tgtEl>
+                </p:cond>
+              </p:prevCondLst>
+              <p:nextCondLst>
+                <p:cond evt="onNext" delay="0">
+                  <p:tgtEl>
+                    <p:sldTgt/>
+                  </p:tgtEl>
+                </p:cond>
+              </p:nextCondLst>
+            </p:seq>
+          </p:childTnLst>
+        </p:cTn>
+      </p:par>
+    </p:tnLst>
+    <p:bldLst>
+      <p:bldP spid="6" grpId="0"/>
+    </p:bldLst>
+  </p:timing>
+</p:sld>
+</file>
+
+<file path=ppt/slides/slide27.xml><?xml version="1.0" encoding="utf-8"?>
+<p:sld xmlns:a="http://schemas.openxmlformats.org/drawingml/2006/main" xmlns:r="http://schemas.openxmlformats.org/officeDocument/2006/relationships" xmlns:p="http://schemas.openxmlformats.org/presentationml/2006/main">
+  <p:cSld>
+    <p:spTree>
+      <p:nvGrpSpPr>
+        <p:cNvPr id="1" name=""/>
+        <p:cNvGrpSpPr/>
+        <p:nvPr/>
+      </p:nvGrpSpPr>
+      <p:grpSpPr>
+        <a:xfrm>
+          <a:off x="0" y="0"/>
+          <a:ext cx="0" cy="0"/>
+          <a:chOff x="0" y="0"/>
+          <a:chExt cx="0" cy="0"/>
+        </a:xfrm>
+      </p:grpSpPr>
+      <p:sp>
+        <p:nvSpPr>
+          <p:cNvPr id="2" name="Footer Placeholder 1">
+            <a:extLst>
+              <a:ext uri="{FF2B5EF4-FFF2-40B4-BE49-F238E27FC236}">
+                <a16:creationId xmlns:a16="http://schemas.microsoft.com/office/drawing/2014/main" id="{C1777451-E705-AA68-EA05-304CA8D8B36D}"/>
+              </a:ext>
+            </a:extLst>
+          </p:cNvPr>
+          <p:cNvSpPr>
+            <a:spLocks noGrp="1"/>
+          </p:cNvSpPr>
+          <p:nvPr>
+            <p:ph type="ftr" sz="quarter" idx="3"/>
+          </p:nvPr>
+        </p:nvSpPr>
+        <p:spPr>
+          <a:xfrm>
+            <a:off x="7234764" y="6466371"/>
+            <a:ext cx="4114800" cy="331932"/>
+          </a:xfrm>
+        </p:spPr>
+        <p:txBody>
+          <a:bodyPr anchor="ctr">
+            <a:normAutofit/>
+          </a:bodyPr>
+          <a:lstStyle/>
+          <a:p>
+            <a:pPr>
+              <a:spcAft>
+                <a:spcPts val="600"/>
+              </a:spcAft>
+            </a:pPr>
+            <a:r>
+              <a:rPr lang="en-US"/>
+              <a:t>WWW.SOLLIANCE.NET</a:t>
+            </a:r>
+          </a:p>
+        </p:txBody>
+      </p:sp>
+      <p:sp>
+        <p:nvSpPr>
+          <p:cNvPr id="3" name="Slide Number Placeholder 2">
+            <a:extLst>
+              <a:ext uri="{FF2B5EF4-FFF2-40B4-BE49-F238E27FC236}">
+                <a16:creationId xmlns:a16="http://schemas.microsoft.com/office/drawing/2014/main" id="{8BFAB6AE-4DBD-69CE-3A2F-7D0409CFFD51}"/>
+              </a:ext>
+            </a:extLst>
+          </p:cNvPr>
+          <p:cNvSpPr>
+            <a:spLocks noGrp="1"/>
+          </p:cNvSpPr>
+          <p:nvPr>
+            <p:ph type="sldNum" sz="quarter" idx="4"/>
+          </p:nvPr>
+        </p:nvSpPr>
+        <p:spPr>
+          <a:xfrm>
+            <a:off x="11636830" y="6466371"/>
+            <a:ext cx="436355" cy="331932"/>
+          </a:xfrm>
+        </p:spPr>
+        <p:txBody>
+          <a:bodyPr anchor="ctr">
+            <a:normAutofit/>
+          </a:bodyPr>
+          <a:lstStyle/>
+          <a:p>
+            <a:pPr>
+              <a:spcAft>
+                <a:spcPts val="600"/>
+              </a:spcAft>
+            </a:pPr>
+            <a:fld id="{00F9DAA1-1DF7-43E0-8E29-0CE1148553C7}" type="slidenum">
+              <a:rPr lang="en-US" smtClean="0"/>
+              <a:pPr>
+                <a:spcAft>
+                  <a:spcPts val="600"/>
+                </a:spcAft>
+              </a:pPr>
+              <a:t>27</a:t>
+            </a:fld>
+            <a:endParaRPr lang="en-US"/>
+          </a:p>
+        </p:txBody>
+      </p:sp>
+      <p:pic>
+        <p:nvPicPr>
+          <p:cNvPr id="10" name="Content Placeholder 9" descr="Person wiping table">
+            <a:extLst>
+              <a:ext uri="{FF2B5EF4-FFF2-40B4-BE49-F238E27FC236}">
+                <a16:creationId xmlns:a16="http://schemas.microsoft.com/office/drawing/2014/main" id="{AD311D95-DE44-4002-A1FB-5466617A1FE6}"/>
+              </a:ext>
+            </a:extLst>
+          </p:cNvPr>
+          <p:cNvPicPr>
+            <a:picLocks noGrp="1" noChangeAspect="1"/>
+          </p:cNvPicPr>
+          <p:nvPr>
+            <p:ph sz="quarter" idx="11"/>
+          </p:nvPr>
+        </p:nvPicPr>
+        <p:blipFill>
+          <a:blip r:embed="rId3"/>
+          <a:srcRect t="12431" r="1" b="25857"/>
+          <a:stretch/>
+        </p:blipFill>
+        <p:spPr>
+          <a:xfrm>
+            <a:off x="5083155" y="342900"/>
+            <a:ext cx="6461145" cy="2661557"/>
+          </a:xfrm>
+          <a:noFill/>
+        </p:spPr>
+      </p:pic>
+      <p:sp>
+        <p:nvSpPr>
+          <p:cNvPr id="8" name="Title 7">
+            <a:extLst>
+              <a:ext uri="{FF2B5EF4-FFF2-40B4-BE49-F238E27FC236}">
+                <a16:creationId xmlns:a16="http://schemas.microsoft.com/office/drawing/2014/main" id="{CF2EF8BE-EDCB-9D14-5840-E1C07726D06A}"/>
+              </a:ext>
+            </a:extLst>
+          </p:cNvPr>
+          <p:cNvSpPr>
+            <a:spLocks noGrp="1"/>
+          </p:cNvSpPr>
+          <p:nvPr>
+            <p:ph type="title"/>
+          </p:nvPr>
+        </p:nvSpPr>
+        <p:spPr>
+          <a:xfrm>
+            <a:off x="647700" y="365125"/>
+            <a:ext cx="4094685" cy="1196975"/>
+          </a:xfrm>
+        </p:spPr>
+        <p:txBody>
+          <a:bodyPr anchor="ctr">
+            <a:normAutofit/>
+          </a:bodyPr>
+          <a:lstStyle/>
+          <a:p>
+            <a:r>
+              <a:rPr lang="en-US"/>
+              <a:t>Data Preparation</a:t>
+            </a:r>
+          </a:p>
+        </p:txBody>
+      </p:sp>
+      <p:sp>
+        <p:nvSpPr>
+          <p:cNvPr id="15" name="Content Placeholder 5">
+            <a:extLst>
+              <a:ext uri="{FF2B5EF4-FFF2-40B4-BE49-F238E27FC236}">
+                <a16:creationId xmlns:a16="http://schemas.microsoft.com/office/drawing/2014/main" id="{D1C02192-CE32-9E56-5B15-851CCA6F57AC}"/>
+              </a:ext>
+            </a:extLst>
+          </p:cNvPr>
+          <p:cNvSpPr>
+            <a:spLocks noGrp="1"/>
+          </p:cNvSpPr>
+          <p:nvPr>
+            <p:ph sz="quarter" idx="12"/>
+          </p:nvPr>
+        </p:nvSpPr>
+        <p:spPr>
+          <a:xfrm>
+            <a:off x="5083155" y="3282043"/>
+            <a:ext cx="6461145" cy="2661557"/>
+          </a:xfrm>
+        </p:spPr>
+        <p:txBody>
+          <a:bodyPr/>
+          <a:lstStyle/>
+          <a:p>
+            <a:endParaRPr lang="en-US"/>
+          </a:p>
+        </p:txBody>
+      </p:sp>
+      <p:sp>
+        <p:nvSpPr>
+          <p:cNvPr id="6" name="Content Placeholder 5">
+            <a:extLst>
+              <a:ext uri="{FF2B5EF4-FFF2-40B4-BE49-F238E27FC236}">
+                <a16:creationId xmlns:a16="http://schemas.microsoft.com/office/drawing/2014/main" id="{DD6C246E-AF91-03D3-9813-FE8DC3B42CAC}"/>
+              </a:ext>
+            </a:extLst>
+          </p:cNvPr>
+          <p:cNvSpPr>
+            <a:spLocks noGrp="1"/>
+          </p:cNvSpPr>
+          <p:nvPr>
+            <p:ph type="body" sz="quarter" idx="13"/>
+            <p:extLst>
+              <p:ext uri="{E7BDC344-281C-4309-B0C6-D0EE65EED2A8}">
+                <p202:designPr xmlns:p202="http://schemas.microsoft.com/office/powerpoint/2020/02/main">
+                  <p202:designTagLst>
+                    <p202:designTag name="ARCH:1:CLS" val="InformationBlock"/>
+                    <p202:designTag name="ARCH:1:VSVAR" val="TitledTextBox"/>
+                  </p202:designTagLst>
+                </p202:designPr>
+              </p:ext>
+            </p:extLst>
+          </p:nvPr>
+        </p:nvSpPr>
+        <p:spPr>
+          <a:xfrm>
+            <a:off x="647700" y="1506417"/>
+            <a:ext cx="4083326" cy="4114800"/>
+          </a:xfrm>
+        </p:spPr>
+        <p:txBody>
+          <a:bodyPr>
+            <a:noAutofit/>
+          </a:bodyPr>
+          <a:lstStyle/>
+          <a:p>
+            <a:pPr marL="0" indent="0">
+              <a:lnSpc>
+                <a:spcPct val="110000"/>
+              </a:lnSpc>
+              <a:spcBef>
+                <a:spcPts val="2500"/>
+              </a:spcBef>
+              <a:buNone/>
+            </a:pPr>
+            <a:r>
+              <a:rPr lang="en-US" sz="1100" b="1" dirty="0"/>
+              <a:t>Cleaning Data</a:t>
+            </a:r>
+          </a:p>
+          <a:p>
+            <a:pPr marL="0" lvl="1" indent="0">
+              <a:lnSpc>
+                <a:spcPct val="110000"/>
+              </a:lnSpc>
+              <a:buNone/>
+            </a:pPr>
+            <a:r>
+              <a:rPr lang="en-US" sz="1100" dirty="0"/>
+              <a:t>Cleaning the data involves identifying and correcting inaccurate or irrelevant data, removing duplicates, and resolving inconsistencies in the data. It is essential for ensuring that the data is accurate and reliable for training a machine learning model.</a:t>
+            </a:r>
+          </a:p>
+          <a:p>
+            <a:pPr marL="0" indent="0">
+              <a:lnSpc>
+                <a:spcPct val="110000"/>
+              </a:lnSpc>
+              <a:spcBef>
+                <a:spcPts val="2500"/>
+              </a:spcBef>
+              <a:buNone/>
+            </a:pPr>
+            <a:r>
+              <a:rPr lang="en-US" sz="1100" b="1" dirty="0"/>
+              <a:t>Handling Missing Values</a:t>
+            </a:r>
+          </a:p>
+          <a:p>
+            <a:pPr marL="0" lvl="1" indent="0">
+              <a:lnSpc>
+                <a:spcPct val="110000"/>
+              </a:lnSpc>
+              <a:buNone/>
+            </a:pPr>
+            <a:r>
+              <a:rPr lang="en-US" sz="1100" dirty="0"/>
+              <a:t>Missing values can occur in datasets due to various reasons, such as data collection errors or incomplete surveys. Techniques used for handling missing values include imputation, deletion, and replacing values with the mean or median of the feature.</a:t>
+            </a:r>
+          </a:p>
+          <a:p>
+            <a:pPr marL="0" indent="0">
+              <a:lnSpc>
+                <a:spcPct val="110000"/>
+              </a:lnSpc>
+              <a:spcBef>
+                <a:spcPts val="2500"/>
+              </a:spcBef>
+              <a:buNone/>
+            </a:pPr>
+            <a:r>
+              <a:rPr lang="en-US" sz="1100" b="1" dirty="0"/>
+              <a:t>Transforming Data</a:t>
+            </a:r>
+          </a:p>
+          <a:p>
+            <a:pPr marL="0" lvl="1" indent="0">
+              <a:lnSpc>
+                <a:spcPct val="110000"/>
+              </a:lnSpc>
+              <a:buNone/>
+            </a:pPr>
+            <a:r>
+              <a:rPr lang="en-US" sz="1100" dirty="0"/>
+              <a:t>Transforming the data involves converting categorical data into numerical data, scaling the data, and feature engineering. Feature engineering involves creating new features from existing ones to improve model performance.</a:t>
+            </a:r>
+          </a:p>
+        </p:txBody>
+      </p:sp>
+    </p:spTree>
+    <p:extLst>
+      <p:ext uri="{BB962C8B-B14F-4D97-AF65-F5344CB8AC3E}">
+        <p14:creationId xmlns:p14="http://schemas.microsoft.com/office/powerpoint/2010/main" val="2803335364"/>
+      </p:ext>
+    </p:extLst>
+  </p:cSld>
+  <p:clrMapOvr>
+    <a:masterClrMapping/>
+  </p:clrMapOvr>
+  <p:transition>
+    <p:fade/>
+  </p:transition>
+  <p:timing>
+    <p:tnLst>
+      <p:par>
+        <p:cTn id="1" dur="indefinite" restart="never" nodeType="tmRoot">
+          <p:childTnLst>
+            <p:seq concurrent="1" nextAc="seek">
+              <p:cTn id="2" dur="indefinite" nodeType="mainSeq">
+                <p:childTnLst>
+                  <p:par>
+                    <p:cTn id="3" fill="hold">
+                      <p:stCondLst>
+                        <p:cond delay="indefinite"/>
+                        <p:cond evt="onBegin" delay="0">
+                          <p:tn val="2"/>
+                        </p:cond>
+                      </p:stCondLst>
+                      <p:childTnLst>
+                        <p:par>
+                          <p:cTn id="4" fill="hold">
+                            <p:stCondLst>
+                              <p:cond delay="0"/>
+                            </p:stCondLst>
+                            <p:childTnLst>
+                              <p:par>
+                                <p:cTn id="5" presetID="42" presetClass="entr" presetSubtype="0" fill="hold" grpId="0" nodeType="withEffect">
+                                  <p:stCondLst>
+                                    <p:cond delay="250"/>
+                                  </p:stCondLst>
+                                  <p:iterate>
+                                    <p:tmPct val="10000"/>
+                                  </p:iterate>
+                                  <p:childTnLst>
+                                    <p:set>
+                                      <p:cBhvr>
+                                        <p:cTn id="6" dur="1" fill="hold">
+                                          <p:stCondLst>
+                                            <p:cond delay="0"/>
+                                          </p:stCondLst>
+                                        </p:cTn>
+                                        <p:tgtEl>
+                                          <p:spTgt spid="6"/>
+                                        </p:tgtEl>
+                                        <p:attrNameLst>
+                                          <p:attrName>style.visibility</p:attrName>
+                                        </p:attrNameLst>
+                                      </p:cBhvr>
+                                      <p:to>
+                                        <p:strVal val="visible"/>
+                                      </p:to>
+                                    </p:set>
+                                    <p:animEffect transition="in" filter="fade">
+                                      <p:cBhvr>
+                                        <p:cTn id="7" dur="250"/>
+                                        <p:tgtEl>
+                                          <p:spTgt spid="6"/>
+                                        </p:tgtEl>
+                                      </p:cBhvr>
+                                    </p:animEffect>
+                                    <p:anim calcmode="lin" valueType="num">
+                                      <p:cBhvr>
+                                        <p:cTn id="8" dur="250" fill="hold"/>
+                                        <p:tgtEl>
+                                          <p:spTgt spid="6"/>
+                                        </p:tgtEl>
+                                        <p:attrNameLst>
+                                          <p:attrName>ppt_x</p:attrName>
+                                        </p:attrNameLst>
+                                      </p:cBhvr>
+                                      <p:tavLst>
+                                        <p:tav tm="0">
+                                          <p:val>
+                                            <p:strVal val="#ppt_x"/>
+                                          </p:val>
+                                        </p:tav>
+                                        <p:tav tm="100000">
+                                          <p:val>
+                                            <p:strVal val="#ppt_x"/>
+                                          </p:val>
+                                        </p:tav>
+                                      </p:tavLst>
+                                    </p:anim>
+                                    <p:anim calcmode="lin" valueType="num">
+                                      <p:cBhvr>
+                                        <p:cTn id="9" dur="250" fill="hold"/>
+                                        <p:tgtEl>
+                                          <p:spTgt spid="6"/>
+                                        </p:tgtEl>
+                                        <p:attrNameLst>
+                                          <p:attrName>ppt_y</p:attrName>
+                                        </p:attrNameLst>
+                                      </p:cBhvr>
+                                      <p:tavLst>
+                                        <p:tav tm="0">
+                                          <p:val>
+                                            <p:strVal val="#ppt_y+.1"/>
+                                          </p:val>
+                                        </p:tav>
+                                        <p:tav tm="100000">
+                                          <p:val>
+                                            <p:strVal val="#ppt_y"/>
+                                          </p:val>
+                                        </p:tav>
+                                      </p:tavLst>
+                                    </p:anim>
+                                  </p:childTnLst>
+                                </p:cTn>
+                              </p:par>
+                            </p:childTnLst>
+                          </p:cTn>
+                        </p:par>
+                      </p:childTnLst>
+                    </p:cTn>
+                  </p:par>
+                </p:childTnLst>
+              </p:cTn>
+              <p:prevCondLst>
+                <p:cond evt="onPrev" delay="0">
+                  <p:tgtEl>
+                    <p:sldTgt/>
+                  </p:tgtEl>
+                </p:cond>
+              </p:prevCondLst>
+              <p:nextCondLst>
+                <p:cond evt="onNext" delay="0">
+                  <p:tgtEl>
+                    <p:sldTgt/>
+                  </p:tgtEl>
+                </p:cond>
+              </p:nextCondLst>
+            </p:seq>
+          </p:childTnLst>
+        </p:cTn>
+      </p:par>
+    </p:tnLst>
+    <p:bldLst>
+      <p:bldP spid="6" grpId="0"/>
+    </p:bldLst>
+  </p:timing>
+</p:sld>
+</file>
+
+<file path=ppt/slides/slide28.xml><?xml version="1.0" encoding="utf-8"?>
+<p:sld xmlns:a="http://schemas.openxmlformats.org/drawingml/2006/main" xmlns:r="http://schemas.openxmlformats.org/officeDocument/2006/relationships" xmlns:p="http://schemas.openxmlformats.org/presentationml/2006/main">
+  <p:cSld>
+    <p:spTree>
+      <p:nvGrpSpPr>
+        <p:cNvPr id="1" name=""/>
+        <p:cNvGrpSpPr/>
+        <p:nvPr/>
+      </p:nvGrpSpPr>
+      <p:grpSpPr>
+        <a:xfrm>
+          <a:off x="0" y="0"/>
+          <a:ext cx="0" cy="0"/>
+          <a:chOff x="0" y="0"/>
+          <a:chExt cx="0" cy="0"/>
+        </a:xfrm>
+      </p:grpSpPr>
+      <p:sp>
+        <p:nvSpPr>
+          <p:cNvPr id="8" name="Title 7">
+            <a:extLst>
+              <a:ext uri="{FF2B5EF4-FFF2-40B4-BE49-F238E27FC236}">
+                <a16:creationId xmlns:a16="http://schemas.microsoft.com/office/drawing/2014/main" id="{C27BE6DA-DF9D-44B9-C007-807FEBE7B107}"/>
+              </a:ext>
+            </a:extLst>
+          </p:cNvPr>
+          <p:cNvSpPr>
+            <a:spLocks noGrp="1"/>
+          </p:cNvSpPr>
+          <p:nvPr>
+            <p:ph type="title"/>
+          </p:nvPr>
+        </p:nvSpPr>
+        <p:spPr>
+          <a:xfrm>
+            <a:off x="640442" y="1240972"/>
+            <a:ext cx="4882243" cy="1416958"/>
+          </a:xfrm>
+        </p:spPr>
+        <p:txBody>
+          <a:bodyPr anchor="ctr">
+            <a:normAutofit/>
+          </a:bodyPr>
+          <a:lstStyle/>
+          <a:p>
+            <a:r>
+              <a:rPr lang="en-US"/>
+              <a:t>Logistic Regression Model Overview</a:t>
+            </a:r>
+          </a:p>
+        </p:txBody>
+      </p:sp>
+      <p:sp>
+        <p:nvSpPr>
+          <p:cNvPr id="2" name="Footer Placeholder 1">
+            <a:extLst>
+              <a:ext uri="{FF2B5EF4-FFF2-40B4-BE49-F238E27FC236}">
+                <a16:creationId xmlns:a16="http://schemas.microsoft.com/office/drawing/2014/main" id="{756FB0C5-7965-E4EF-545A-E3F62FB228D3}"/>
+              </a:ext>
+            </a:extLst>
+          </p:cNvPr>
+          <p:cNvSpPr>
+            <a:spLocks noGrp="1"/>
+          </p:cNvSpPr>
+          <p:nvPr>
+            <p:ph type="ftr" sz="quarter" idx="3"/>
+          </p:nvPr>
+        </p:nvSpPr>
+        <p:spPr>
+          <a:xfrm>
+            <a:off x="7234764" y="6466371"/>
+            <a:ext cx="4114800" cy="331932"/>
+          </a:xfrm>
+        </p:spPr>
+        <p:txBody>
+          <a:bodyPr anchor="ctr">
+            <a:normAutofit/>
+          </a:bodyPr>
+          <a:lstStyle/>
+          <a:p>
+            <a:pPr>
+              <a:spcAft>
+                <a:spcPts val="600"/>
+              </a:spcAft>
+            </a:pPr>
+            <a:r>
+              <a:rPr lang="en-US"/>
+              <a:t>WWW.SOLLIANCE.NET</a:t>
+            </a:r>
+          </a:p>
+        </p:txBody>
+      </p:sp>
+      <p:sp>
+        <p:nvSpPr>
+          <p:cNvPr id="3" name="Slide Number Placeholder 2">
+            <a:extLst>
+              <a:ext uri="{FF2B5EF4-FFF2-40B4-BE49-F238E27FC236}">
+                <a16:creationId xmlns:a16="http://schemas.microsoft.com/office/drawing/2014/main" id="{360F2361-7031-1F1B-2F64-F02027227C9F}"/>
+              </a:ext>
+            </a:extLst>
+          </p:cNvPr>
+          <p:cNvSpPr>
+            <a:spLocks noGrp="1"/>
+          </p:cNvSpPr>
+          <p:nvPr>
+            <p:ph type="sldNum" sz="quarter" idx="4"/>
+          </p:nvPr>
+        </p:nvSpPr>
+        <p:spPr>
+          <a:xfrm>
+            <a:off x="11636830" y="6466371"/>
+            <a:ext cx="436355" cy="331932"/>
+          </a:xfrm>
+        </p:spPr>
+        <p:txBody>
+          <a:bodyPr anchor="ctr">
+            <a:normAutofit/>
+          </a:bodyPr>
+          <a:lstStyle/>
+          <a:p>
+            <a:pPr>
+              <a:spcAft>
+                <a:spcPts val="600"/>
+              </a:spcAft>
+            </a:pPr>
+            <a:fld id="{00F9DAA1-1DF7-43E0-8E29-0CE1148553C7}" type="slidenum">
+              <a:rPr lang="en-US" smtClean="0"/>
+              <a:pPr>
+                <a:spcAft>
+                  <a:spcPts val="600"/>
+                </a:spcAft>
+              </a:pPr>
+              <a:t>28</a:t>
+            </a:fld>
+            <a:endParaRPr lang="en-US"/>
+          </a:p>
+        </p:txBody>
+      </p:sp>
+      <p:sp>
+        <p:nvSpPr>
+          <p:cNvPr id="6" name="Content Placeholder 5">
+            <a:extLst>
+              <a:ext uri="{FF2B5EF4-FFF2-40B4-BE49-F238E27FC236}">
+                <a16:creationId xmlns:a16="http://schemas.microsoft.com/office/drawing/2014/main" id="{F44F216C-6BD2-7BDB-FC3C-23366823325E}"/>
+              </a:ext>
+            </a:extLst>
+          </p:cNvPr>
+          <p:cNvSpPr>
+            <a:spLocks noGrp="1"/>
+          </p:cNvSpPr>
+          <p:nvPr>
+            <p:ph type="body" sz="quarter" idx="10"/>
+            <p:extLst>
+              <p:ext uri="{E7BDC344-281C-4309-B0C6-D0EE65EED2A8}">
+                <p202:designPr xmlns:p202="http://schemas.microsoft.com/office/powerpoint/2020/02/main">
+                  <p202:designTagLst>
+                    <p202:designTag name="ARCH:1:CLS" val="InformationBlock"/>
+                    <p202:designTag name="ARCH:1:VSVAR" val="TitledTextBox"/>
+                  </p202:designTagLst>
+                </p202:designPr>
+              </p:ext>
+            </p:extLst>
+          </p:nvPr>
+        </p:nvSpPr>
+        <p:spPr>
+          <a:xfrm>
+            <a:off x="647700" y="2606042"/>
+            <a:ext cx="4882243" cy="3577881"/>
+          </a:xfrm>
+          <a:solidFill>
+            <a:srgbClr val="1A1F20">
+              <a:alpha val="40000"/>
+            </a:srgbClr>
+          </a:solidFill>
+        </p:spPr>
+        <p:txBody>
+          <a:bodyPr>
+            <a:noAutofit/>
+          </a:bodyPr>
+          <a:lstStyle/>
+          <a:p>
+            <a:pPr marL="0" indent="0">
+              <a:lnSpc>
+                <a:spcPct val="110000"/>
+              </a:lnSpc>
+              <a:spcBef>
+                <a:spcPts val="2500"/>
+              </a:spcBef>
+              <a:buNone/>
+            </a:pPr>
+            <a:r>
+              <a:rPr lang="en-US" b="1" dirty="0"/>
+              <a:t>Logistic Regression</a:t>
+            </a:r>
+          </a:p>
+          <a:p>
+            <a:pPr marL="0" lvl="1" indent="0">
+              <a:lnSpc>
+                <a:spcPct val="110000"/>
+              </a:lnSpc>
+              <a:buNone/>
+            </a:pPr>
+            <a:r>
+              <a:rPr lang="en-US" sz="1400" dirty="0"/>
+              <a:t>Logistic Regression is a classification algorithm used in Machine Learning to predict binary outcomes or probabilities. It is based on the concept of probability theory and the logistic function.</a:t>
+            </a:r>
+          </a:p>
+          <a:p>
+            <a:pPr marL="0" indent="0">
+              <a:lnSpc>
+                <a:spcPct val="110000"/>
+              </a:lnSpc>
+              <a:spcBef>
+                <a:spcPts val="2500"/>
+              </a:spcBef>
+              <a:buNone/>
+            </a:pPr>
+            <a:r>
+              <a:rPr lang="en-US" b="1" dirty="0"/>
+              <a:t>Working of Logistic Regression</a:t>
+            </a:r>
+          </a:p>
+          <a:p>
+            <a:pPr marL="0" lvl="1" indent="0">
+              <a:lnSpc>
+                <a:spcPct val="110000"/>
+              </a:lnSpc>
+              <a:buNone/>
+            </a:pPr>
+            <a:r>
+              <a:rPr lang="en-US" sz="1400" dirty="0"/>
+              <a:t>Logistic Regression models the probability of a binary response by transforming the linear equation into a sigmoid curve. The sigmoid curve can be used to predict the probability of a binary outcome or classify the outcome into a specific class based on a threshold value.</a:t>
+            </a:r>
+          </a:p>
+        </p:txBody>
+      </p:sp>
+      <p:pic>
+        <p:nvPicPr>
+          <p:cNvPr id="10" name="Content Placeholder 9" descr="Pictorial representation of a graph chart">
+            <a:extLst>
+              <a:ext uri="{FF2B5EF4-FFF2-40B4-BE49-F238E27FC236}">
+                <a16:creationId xmlns:a16="http://schemas.microsoft.com/office/drawing/2014/main" id="{5F498655-3A7E-4427-B7B1-7816A70C62C7}"/>
+              </a:ext>
+            </a:extLst>
+          </p:cNvPr>
+          <p:cNvPicPr>
+            <a:picLocks noGrp="1" noChangeAspect="1"/>
+          </p:cNvPicPr>
+          <p:nvPr>
+            <p:ph sz="quarter" idx="11"/>
+          </p:nvPr>
+        </p:nvPicPr>
+        <p:blipFill>
+          <a:blip r:embed="rId3"/>
+          <a:stretch>
+            <a:fillRect/>
+          </a:stretch>
+        </p:blipFill>
+        <p:spPr>
+          <a:xfrm>
+            <a:off x="6679096" y="1623809"/>
+            <a:ext cx="4865204" cy="3247524"/>
+          </a:xfrm>
+          <a:noFill/>
+        </p:spPr>
+      </p:pic>
+    </p:spTree>
+    <p:extLst>
+      <p:ext uri="{BB962C8B-B14F-4D97-AF65-F5344CB8AC3E}">
+        <p14:creationId xmlns:p14="http://schemas.microsoft.com/office/powerpoint/2010/main" val="1083057356"/>
+      </p:ext>
+    </p:extLst>
+  </p:cSld>
+  <p:clrMapOvr>
+    <a:masterClrMapping/>
+  </p:clrMapOvr>
+  <p:transition>
+    <p:fade/>
+  </p:transition>
+  <p:timing>
+    <p:tnLst>
+      <p:par>
+        <p:cTn id="1" dur="indefinite" restart="never" nodeType="tmRoot">
+          <p:childTnLst>
+            <p:seq concurrent="1" nextAc="seek">
+              <p:cTn id="2" dur="indefinite" nodeType="mainSeq">
+                <p:childTnLst>
+                  <p:par>
+                    <p:cTn id="3" fill="hold">
+                      <p:stCondLst>
+                        <p:cond delay="indefinite"/>
+                        <p:cond evt="onBegin" delay="0">
+                          <p:tn val="2"/>
+                        </p:cond>
+                      </p:stCondLst>
+                      <p:childTnLst>
+                        <p:par>
+                          <p:cTn id="4" fill="hold">
+                            <p:stCondLst>
+                              <p:cond delay="0"/>
+                            </p:stCondLst>
+                            <p:childTnLst>
+                              <p:par>
+                                <p:cTn id="5" presetID="42" presetClass="entr" presetSubtype="0" fill="hold" grpId="0" nodeType="withEffect">
+                                  <p:stCondLst>
+                                    <p:cond delay="250"/>
+                                  </p:stCondLst>
+                                  <p:iterate>
+                                    <p:tmPct val="10000"/>
+                                  </p:iterate>
+                                  <p:childTnLst>
+                                    <p:set>
+                                      <p:cBhvr>
+                                        <p:cTn id="6" dur="1" fill="hold">
+                                          <p:stCondLst>
+                                            <p:cond delay="0"/>
+                                          </p:stCondLst>
+                                        </p:cTn>
+                                        <p:tgtEl>
+                                          <p:spTgt spid="6"/>
+                                        </p:tgtEl>
+                                        <p:attrNameLst>
+                                          <p:attrName>style.visibility</p:attrName>
+                                        </p:attrNameLst>
+                                      </p:cBhvr>
+                                      <p:to>
+                                        <p:strVal val="visible"/>
+                                      </p:to>
+                                    </p:set>
+                                    <p:animEffect transition="in" filter="fade">
+                                      <p:cBhvr>
+                                        <p:cTn id="7" dur="250"/>
+                                        <p:tgtEl>
+                                          <p:spTgt spid="6"/>
+                                        </p:tgtEl>
+                                      </p:cBhvr>
+                                    </p:animEffect>
+                                    <p:anim calcmode="lin" valueType="num">
+                                      <p:cBhvr>
+                                        <p:cTn id="8" dur="250" fill="hold"/>
+                                        <p:tgtEl>
+                                          <p:spTgt spid="6"/>
+                                        </p:tgtEl>
+                                        <p:attrNameLst>
+                                          <p:attrName>ppt_x</p:attrName>
+                                        </p:attrNameLst>
+                                      </p:cBhvr>
+                                      <p:tavLst>
+                                        <p:tav tm="0">
+                                          <p:val>
+                                            <p:strVal val="#ppt_x"/>
+                                          </p:val>
+                                        </p:tav>
+                                        <p:tav tm="100000">
+                                          <p:val>
+                                            <p:strVal val="#ppt_x"/>
+                                          </p:val>
+                                        </p:tav>
+                                      </p:tavLst>
+                                    </p:anim>
+                                    <p:anim calcmode="lin" valueType="num">
+                                      <p:cBhvr>
+                                        <p:cTn id="9" dur="250" fill="hold"/>
+                                        <p:tgtEl>
+                                          <p:spTgt spid="6"/>
+                                        </p:tgtEl>
+                                        <p:attrNameLst>
+                                          <p:attrName>ppt_y</p:attrName>
+                                        </p:attrNameLst>
+                                      </p:cBhvr>
+                                      <p:tavLst>
+                                        <p:tav tm="0">
+                                          <p:val>
+                                            <p:strVal val="#ppt_y+.1"/>
+                                          </p:val>
+                                        </p:tav>
+                                        <p:tav tm="100000">
+                                          <p:val>
+                                            <p:strVal val="#ppt_y"/>
+                                          </p:val>
+                                        </p:tav>
+                                      </p:tavLst>
+                                    </p:anim>
+                                  </p:childTnLst>
+                                </p:cTn>
+                              </p:par>
+                            </p:childTnLst>
+                          </p:cTn>
+                        </p:par>
+                      </p:childTnLst>
+                    </p:cTn>
+                  </p:par>
+                </p:childTnLst>
+              </p:cTn>
+              <p:prevCondLst>
+                <p:cond evt="onPrev" delay="0">
+                  <p:tgtEl>
+                    <p:sldTgt/>
+                  </p:tgtEl>
+                </p:cond>
+              </p:prevCondLst>
+              <p:nextCondLst>
+                <p:cond evt="onNext" delay="0">
+                  <p:tgtEl>
+                    <p:sldTgt/>
+                  </p:tgtEl>
+                </p:cond>
+              </p:nextCondLst>
+            </p:seq>
+          </p:childTnLst>
+        </p:cTn>
+      </p:par>
+    </p:tnLst>
+    <p:bldLst>
+      <p:bldP spid="6" grpId="0"/>
+    </p:bldLst>
+  </p:timing>
+</p:sld>
+</file>
+
+<file path=ppt/slides/slide29.xml><?xml version="1.0" encoding="utf-8"?>
 <p:sld xmlns:a="http://schemas.openxmlformats.org/drawingml/2006/main" xmlns:r="http://schemas.openxmlformats.org/officeDocument/2006/relationships" xmlns:p="http://schemas.openxmlformats.org/presentationml/2006/main">
   <p:cSld>
     <p:spTree>
